--- a/09. Persisting Data/Persisting Data.pptx
+++ b/09. Persisting Data/Persisting Data.pptx
@@ -2513,7 +2513,7 @@
         </p:nvSpPr>
         <p:spPr>
           <a:xfrm>
-            <a:off x="1143309" y="685800"/>
+            <a:off x="1143000" y="685800"/>
             <a:ext cx="4572000" cy="3429000"/>
           </a:xfrm>
           <a:custGeom>
@@ -11505,7 +11505,7 @@
             </a:pPr>
             <a:r>
               <a:rPr lang="en-GB" dirty="0"/>
-              <a:t>you can combine: keep comments in their own collection, but embed few comments in the post to be able to display them with the post</a:t>
+              <a:t>you can combine, keep comments in their own collection, but embed few comments in the post to be able to display them with the post</a:t>
             </a:r>
           </a:p>
           <a:p>
@@ -13231,7 +13231,7 @@
             </a:pPr>
             <a:r>
               <a:rPr lang="en-GB" dirty="0"/>
-              <a:t>thus, if there is a partition, you have to choose between consistency or availability</a:t>
+              <a:t>thus, if there is a partition, you must choose between consistency or availability</a:t>
             </a:r>
           </a:p>
         </p:txBody>
@@ -14450,15 +14450,7 @@
             </a:pPr>
             <a:r>
               <a:rPr lang="en-GB" dirty="0"/>
-              <a:t>An Object Data </a:t>
-            </a:r>
-            <a:r>
-              <a:rPr lang="en-GB" dirty="0" err="1"/>
-              <a:t>Modeling</a:t>
-            </a:r>
-            <a:r>
-              <a:rPr lang="en-GB" dirty="0"/>
-              <a:t> (ODM)</a:t>
+              <a:t>An Object Data Modelling (ODM)</a:t>
             </a:r>
             <a:endParaRPr dirty="0"/>
           </a:p>
@@ -14478,15 +14470,7 @@
             </a:pPr>
             <a:r>
               <a:rPr lang="en-GB" dirty="0"/>
-              <a:t>provides a </a:t>
-            </a:r>
-            <a:r>
-              <a:rPr lang="en-GB" dirty="0" err="1"/>
-              <a:t>modeling</a:t>
-            </a:r>
-            <a:r>
-              <a:rPr lang="en-GB" dirty="0"/>
-              <a:t> environment for data</a:t>
+              <a:t>provides a modelling environment for data</a:t>
             </a:r>
             <a:endParaRPr dirty="0"/>
           </a:p>
@@ -15127,6 +15111,13 @@
               <a:tailEnd type="none" w="med" len="med"/>
             </a:ln>
           </p:spPr>
+          <p:txBody>
+            <a:bodyPr/>
+            <a:lstStyle/>
+            <a:p>
+              <a:endParaRPr lang="en-GB"/>
+            </a:p>
+          </p:txBody>
         </p:sp>
         <p:sp>
           <p:nvSpPr>
@@ -15174,6 +15165,13 @@
               <a:tailEnd type="none" w="med" len="med"/>
             </a:ln>
           </p:spPr>
+          <p:txBody>
+            <a:bodyPr/>
+            <a:lstStyle/>
+            <a:p>
+              <a:endParaRPr lang="en-GB"/>
+            </a:p>
+          </p:txBody>
         </p:sp>
         <p:sp>
           <p:nvSpPr>
@@ -15221,6 +15219,13 @@
               <a:tailEnd type="none" w="med" len="med"/>
             </a:ln>
           </p:spPr>
+          <p:txBody>
+            <a:bodyPr/>
+            <a:lstStyle/>
+            <a:p>
+              <a:endParaRPr lang="en-GB"/>
+            </a:p>
+          </p:txBody>
         </p:sp>
       </p:grpSp>
       <p:sp>
@@ -16588,10 +16593,10 @@
               <a:buNone/>
             </a:pPr>
             <a:r>
-              <a:rPr lang="en-GB" sz="1200"/>
+              <a:rPr lang="en-GB" sz="1200" dirty="0"/>
               <a:t>Observe</a:t>
             </a:r>
-            <a:endParaRPr sz="1200"/>
+            <a:endParaRPr sz="1200" dirty="0"/>
           </a:p>
         </p:txBody>
       </p:sp>
@@ -17316,6 +17321,7 @@
         <p:nvCxnSpPr>
           <p:cNvPr id="277" name="Google Shape;277;p32"/>
           <p:cNvCxnSpPr>
+            <a:cxnSpLocks/>
             <a:stCxn id="247" idx="3"/>
             <a:endCxn id="275" idx="3"/>
           </p:cNvCxnSpPr>
@@ -20460,7 +20466,7 @@
         </p:blipFill>
         <p:spPr>
           <a:xfrm>
-            <a:off x="3461775" y="4126711"/>
+            <a:off x="3682491" y="4095180"/>
             <a:ext cx="296550" cy="256250"/>
           </a:xfrm>
           <a:prstGeom prst="rect">
@@ -21775,7 +21781,7 @@
             </a:pPr>
             <a:r>
               <a:rPr lang="en-GB" dirty="0"/>
-              <a:t>again use find to list the documents</a:t>
+              <a:t>again, use find to list the documents</a:t>
             </a:r>
             <a:endParaRPr dirty="0"/>
           </a:p>
@@ -22839,7 +22845,7 @@
             </a:pPr>
             <a:r>
               <a:rPr lang="en-GB" dirty="0"/>
-              <a:t>MongoDB supports arrays as first class objects</a:t>
+              <a:t>MongoDB supports arrays as first-class objects</a:t>
             </a:r>
             <a:endParaRPr dirty="0"/>
           </a:p>
@@ -23811,7 +23817,7 @@
                 <a:cs typeface="Courier New"/>
                 <a:sym typeface="Courier New"/>
               </a:rPr>
-              <a:t> 15'},{hits:1},{</a:t>
+              <a:t> 15'}, {$set: {hits:1}},{</a:t>
             </a:r>
             <a:r>
               <a:rPr lang="en-GB" dirty="0" err="1">
@@ -23885,7 +23891,7 @@
             </a:pPr>
             <a:r>
               <a:rPr lang="en-GB" dirty="0"/>
-              <a:t>by default update updates only the first matching document</a:t>
+              <a:t>by default, update updates only the first matching document</a:t>
             </a:r>
             <a:endParaRPr dirty="0"/>
           </a:p>
